--- a/pptx/midterm/REMUS_Progress_Slide_6.pptx
+++ b/pptx/midterm/REMUS_Progress_Slide_6.pptx
@@ -5,10 +5,10 @@
     <p:sldMasterId xmlns:r="http://schemas.openxmlformats.org/officeDocument/2006/relationships" id="2147483648" r:id="rId1"/>
   </p:sldMasterIdLst>
   <p:notesMasterIdLst>
-    <p:notesMasterId r:id="R1fac4928d6b24a4a"/>
+    <p:notesMasterId r:id="R0f26bd88ac384b1f"/>
   </p:notesMasterIdLst>
   <p:sldIdLst>
-    <p:sldId id="256" r:id="R3e9a999a88f54372"/>
+    <p:sldId id="256" r:id="R70c63acfe049485b"/>
   </p:sldIdLst>
   <p:sldSz cx="12192000" cy="6858000" type="screen16x9"/>
   <p:notesSz cx="6858000" cy="9144000"/>
@@ -471,7 +471,7 @@
           <a:p xmlns:a="http://schemas.openxmlformats.org/drawingml/2006/main">
             <a:r>
               <a:rPr lang="en-US"/>
-              <a:t>REMUS builds on DUOHUAFEN's LI-TDM for cycle-accurate execution. The first-stage receive and last-stage send are omitted to reduce redundant communication; this is a protocol optimization, not a measured percentage speedup. Keep these implementation details in the narration. For global pause, the Host collects all receive-barrier acknowledgements before sampling stable counters. Barrier acknowledgement alone is not a valid global pause. In the illustrative example, B is at 41 and A at 42. The common target is 43; configure two steps for B and one for A while barriers remain held, then release B before A. LI-TDM dependencies still apply. Finally check stopped/pause status and final counters on all partitions. Equal logical cycles do not imply simultaneous physical stops or prove all-state equivalence. Required propagation must finish. The diagram's shared arrows are a simplified visual summary of Host operations on each partition, not FPGA-to-FPGA forwarding of Host commands. The cycle numbers are illustrative, not experimental data. Source: src/midterm/progress/cycle_control.tex. The right illustration is intentionally a raster crop per user request; the title, left text and page number are editable. The three requested supplementary callouts from the design reference are omitted.</a:t>
+              <a:t>REMUS builds on DUOHUAFEN's LI-TDM for cycle-accurate execution. The first-stage receive and last-stage send are omitted to reduce redundant communication; this is a protocol optimization, not a measured percentage speedup. Keep these implementation details in the narration. For global pause, the Host collects all receive-barrier acknowledgements before sampling stable counters. Barrier acknowledgement alone is not a valid global pause. In the illustrative example, B is at 41 and A at 42. The common target is 43; configure two steps for B and one for A while barriers remain held, then release B before A. LI-TDM dependencies still apply. Finally check stopped/pause status and final counters on all partitions. Equal logical cycles do not imply simultaneous physical stops or prove all-state equivalence. Required propagation must finish. The diagram's shared arrows are a simplified visual summary of Host operations on each partition, not FPGA-to-FPGA forwarding of Host commands. The cycle numbers are illustrative, not experimental data. Source: src/midterm/progress/cycle_control.tex. The right illustration is intentionally a raster crop per user request; the title, left text and page number are editable. The three requested supplementary callouts from the design reference are omitted. Reference [1]: G. Zhu. Cross-Node Deployment of Digital Logic Design for FPGA Cloud. Master's thesis, ShanghaiTech University, 2024.</a:t>
             </a:r>
           </a:p>
         </p:txBody>
@@ -775,8 +775,8 @@
 </file>
 
 <file path=ppt/slides/slide1.xml><?xml version="1.0" encoding="utf-8"?>
-<p:sld xmlns:a="http://schemas.openxmlformats.org/drawingml/2006/main" xmlns:p="http://schemas.openxmlformats.org/presentationml/2006/main">
-  <p:cSld>
+<p:sld xmlns:a="http://schemas.openxmlformats.org/drawingml/2006/main" xmlns:r="http://schemas.openxmlformats.org/officeDocument/2006/relationships" xmlns:p="http://schemas.openxmlformats.org/presentationml/2006/main">
+  <p:cSld xmlns:a="http://schemas.openxmlformats.org/drawingml/2006/main" xmlns:p="http://schemas.openxmlformats.org/presentationml/2006/main" xmlns:r="http://schemas.openxmlformats.org/officeDocument/2006/relationships">
     <p:bg>
       <p:bgPr>
         <a:solidFill xmlns:a="http://schemas.openxmlformats.org/drawingml/2006/main">
@@ -814,16 +814,27 @@
             <a:noAutofit/>
           </a:bodyPr>
           <a:lstStyle xmlns:a="http://schemas.openxmlformats.org/drawingml/2006/main"/>
-          <a:p xmlns:a="http://schemas.openxmlformats.org/drawingml/2006/main">
-            <a:r>
-              <a:rPr lang="en-US" sz="3000" b="1">
+          <a:p>
+            <a:pPr algn="l">
+              <a:lnSpc>
+                <a:spcPct val="90000"/>
+              </a:lnSpc>
+              <a:defRPr sz="3000" b="1">
                 <a:solidFill>
                   <a:srgbClr val="183B56"/>
                 </a:solidFill>
                 <a:latin typeface="Arial"/>
                 <a:ea typeface="Arial"/>
-              </a:rPr>
-              <a:t>6. Cycle-Accurate Execution and Global Pause</a:t>
+              </a:defRPr>
+            </a:pPr>
+            <a:r>
+              <a:rPr sz="3000" b="1">
+                <a:solidFill>
+                  <a:srgbClr val="183B56"/>
+                </a:solidFill>
+                <a:latin typeface="Arial"/>
+              </a:rPr>
+              <a:t>Pregress1:  Cycle-Accurate Execution and Global Pause</a:t>
             </a:r>
           </a:p>
         </p:txBody>
@@ -905,14 +916,166 @@
       </p:sp>
       <p:sp>
         <p:nvSpPr>
-          <p:cNvPr id="100002" name="S06.Execution.Bullet1"/>
+          <p:cNvPr id="100003" name="S06.Execution.Text1"/>
+          <p:cNvSpPr txBox="1"/>
+          <p:nvPr/>
+        </p:nvSpPr>
+        <p:spPr>
+          <a:xfrm>
+            <a:off x="424844" y="1856232"/>
+            <a:ext cx="3642111" cy="548640"/>
+          </a:xfrm>
+          <a:prstGeom prst="rect">
+            <a:avLst/>
+          </a:prstGeom>
+          <a:noFill/>
+          <a:ln>
+            <a:noFill/>
+          </a:ln>
+        </p:spPr>
+        <p:txBody>
+          <a:bodyPr lIns="0" tIns="0" rIns="0" bIns="0">
+            <a:noAutofit/>
+          </a:bodyPr>
+          <a:lstStyle/>
+          <a:p>
+            <a:pPr marL="285750" indent="-285750" algn="l">
+              <a:buFont xmlns:a="http://schemas.openxmlformats.org/drawingml/2006/main" typeface="Arial" panose="020B0604020202020204" pitchFamily="34" charset="0"/>
+              <a:buChar xmlns:a="http://schemas.openxmlformats.org/drawingml/2006/main" char="•"/>
+              <a:defRPr sz="1800" b="0">
+                <a:solidFill>
+                  <a:srgbClr val="20354A"/>
+                </a:solidFill>
+                <a:latin typeface="Arial"/>
+                <a:ea typeface="Arial"/>
+              </a:defRPr>
+            </a:pPr>
+            <a:r>
+              <a:rPr lang="en-US">
+                <a:solidFill>
+                  <a:srgbClr val="20354A"/>
+                </a:solidFill>
+                <a:latin typeface="Arial"/>
+              </a:rPr>
+              <a:t>Execution b</a:t>
+            </a:r>
+            <a:r>
+              <a:rPr lang="en-US" sz="1800">
+                <a:solidFill>
+                  <a:srgbClr val="20354A"/>
+                </a:solidFill>
+                <a:latin typeface="Arial"/>
+              </a:rPr>
+              <a:t>ased on DUOHUAFEN LI-TDM</a:t>
+            </a:r>
+            <a:r>
+              <a:rPr lang="en-US" baseline="30000">
+                <a:solidFill>
+                  <a:srgbClr val="20354A"/>
+                </a:solidFill>
+                <a:latin typeface="Arial"/>
+              </a:rPr>
+              <a:t>[1]</a:t>
+            </a:r>
+          </a:p>
+        </p:txBody>
+      </p:sp>
+      <p:sp>
+        <p:nvSpPr>
+          <p:cNvPr id="100005" name="S06.Execution.Text2"/>
+          <p:cNvSpPr txBox="1"/>
+          <p:nvPr/>
+        </p:nvSpPr>
+        <p:spPr>
+          <a:xfrm>
+            <a:off x="406556" y="2589160"/>
+            <a:ext cx="3552795" cy="548640"/>
+          </a:xfrm>
+          <a:prstGeom prst="rect">
+            <a:avLst/>
+          </a:prstGeom>
+          <a:noFill/>
+          <a:ln>
+            <a:noFill/>
+          </a:ln>
+        </p:spPr>
+        <p:txBody>
+          <a:bodyPr lIns="0" tIns="0" rIns="0" bIns="0">
+            <a:noAutofit/>
+          </a:bodyPr>
+          <a:lstStyle/>
+          <a:p>
+            <a:pPr marL="285750" indent="-285750" algn="l">
+              <a:buFont xmlns:a="http://schemas.openxmlformats.org/drawingml/2006/main" typeface="Arial" panose="020B0604020202020204" pitchFamily="34" charset="0"/>
+              <a:buChar xmlns:a="http://schemas.openxmlformats.org/drawingml/2006/main" char="•"/>
+              <a:defRPr sz="1800" b="0">
+                <a:solidFill>
+                  <a:srgbClr val="20354A"/>
+                </a:solidFill>
+                <a:latin typeface="Arial"/>
+                <a:ea typeface="Arial"/>
+              </a:defRPr>
+            </a:pPr>
+            <a:r>
+              <a:rPr sz="1800">
+                <a:solidFill>
+                  <a:srgbClr val="20354A"/>
+                </a:solidFill>
+                <a:latin typeface="Arial"/>
+              </a:rPr>
+              <a:t>Optimized communication flow</a:t>
+            </a:r>
+          </a:p>
+        </p:txBody>
+      </p:sp>
+      <p:sp>
+        <p:nvSpPr>
+          <p:cNvPr id="100007" name="S06.Pause.Heading"/>
+          <p:cNvSpPr txBox="1"/>
+          <p:nvPr/>
+        </p:nvSpPr>
+        <p:spPr>
+          <a:xfrm>
+            <a:off x="320040" y="4028585"/>
+            <a:ext cx="3657600" cy="640080"/>
+          </a:xfrm>
+          <a:prstGeom prst="rect">
+            <a:avLst/>
+          </a:prstGeom>
+          <a:noFill/>
+          <a:ln>
+            <a:noFill/>
+          </a:ln>
+        </p:spPr>
+        <p:txBody>
+          <a:bodyPr lIns="0" tIns="0" rIns="0" bIns="0">
+            <a:noAutofit/>
+          </a:bodyPr>
+          <a:lstStyle/>
+          <a:p>
+            <a:r>
+              <a:rPr lang="en-US" sz="2200" b="1">
+                <a:solidFill>
+                  <a:srgbClr val="183B56"/>
+                </a:solidFill>
+                <a:latin typeface="Arial"/>
+                <a:ea typeface="Arial"/>
+              </a:rPr>
+              <a:t>Cycle-Consistent Pause</a:t>
+            </a:r>
+          </a:p>
+        </p:txBody>
+      </p:sp>
+      <p:sp>
+        <p:nvSpPr>
+          <p:cNvPr id="100008" name="S06.Pause.Number1"/>
           <p:cNvSpPr/>
           <p:nvPr/>
         </p:nvSpPr>
         <p:spPr>
           <a:xfrm>
-            <a:off x="411480" y="1956816"/>
-            <a:ext cx="82296" cy="82296"/>
+            <a:off x="393192" y="4760105"/>
+            <a:ext cx="292608" cy="292608"/>
           </a:xfrm>
           <a:prstGeom prst="ellipse">
             <a:avLst/>
@@ -925,46 +1088,50 @@
           </a:ln>
         </p:spPr>
         <p:txBody>
+          <a:bodyPr lIns="0" tIns="0" rIns="0" bIns="0" anchor="ctr">
+            <a:noAutofit/>
+          </a:bodyPr>
+          <a:lstStyle/>
+          <a:p>
+            <a:pPr algn="ctr"/>
+            <a:r>
+              <a:rPr lang="en-US" sz="1400" b="1">
+                <a:solidFill>
+                  <a:srgbClr val="FFFFFF"/>
+                </a:solidFill>
+                <a:latin typeface="Arial"/>
+                <a:ea typeface="Arial"/>
+              </a:rPr>
+              <a:t>1</a:t>
+            </a:r>
+          </a:p>
+        </p:txBody>
+      </p:sp>
+      <p:sp>
+        <p:nvSpPr>
+          <p:cNvPr id="100009" name="S06.Pause.Text1"/>
+          <p:cNvSpPr txBox="1"/>
+          <p:nvPr/>
+        </p:nvSpPr>
+        <p:spPr>
+          <a:xfrm>
+            <a:off x="832104" y="4750961"/>
+            <a:ext cx="3044952" cy="438912"/>
+          </a:xfrm>
+          <a:prstGeom prst="rect">
+            <a:avLst/>
+          </a:prstGeom>
+          <a:noFill/>
+          <a:ln>
+            <a:noFill/>
+          </a:ln>
+        </p:spPr>
+        <p:txBody>
           <a:bodyPr lIns="0" tIns="0" rIns="0" bIns="0">
             <a:noAutofit/>
           </a:bodyPr>
           <a:lstStyle/>
           <a:p>
-            <a:endParaRPr lang="en-US" sz="1800">
-              <a:solidFill>
-                <a:srgbClr val="20354A"/>
-              </a:solidFill>
-              <a:latin typeface="Arial"/>
-              <a:ea typeface="Arial"/>
-            </a:endParaRPr>
-          </a:p>
-        </p:txBody>
-      </p:sp>
-      <p:sp>
-        <p:nvSpPr>
-          <p:cNvPr id="100003" name="S06.Execution.Text1"/>
-          <p:cNvSpPr txBox="1"/>
-          <p:nvPr/>
-        </p:nvSpPr>
-        <p:spPr>
-          <a:xfrm>
-            <a:off x="621792" y="1856232"/>
-            <a:ext cx="3273552" cy="548640"/>
-          </a:xfrm>
-          <a:prstGeom prst="rect">
-            <a:avLst/>
-          </a:prstGeom>
-          <a:noFill/>
-          <a:ln>
-            <a:noFill/>
-          </a:ln>
-        </p:spPr>
-        <p:txBody>
-          <a:bodyPr lIns="0" tIns="0" rIns="0" bIns="0">
-            <a:noAutofit/>
-          </a:bodyPr>
-          <a:lstStyle/>
-          <a:p>
             <a:r>
               <a:rPr lang="en-US" sz="1800">
                 <a:solidFill>
@@ -973,21 +1140,21 @@
                 <a:latin typeface="Arial"/>
                 <a:ea typeface="Arial"/>
               </a:rPr>
-              <a:t>LI-TDM-based execution</a:t>
-            </a:r>
-          </a:p>
-        </p:txBody>
-      </p:sp>
-      <p:sp>
-        <p:nvSpPr>
-          <p:cNvPr id="100004" name="S06.Execution.Bullet2"/>
+              <a:t>Stabilize progress</a:t>
+            </a:r>
+          </a:p>
+        </p:txBody>
+      </p:sp>
+      <p:sp>
+        <p:nvSpPr>
+          <p:cNvPr id="100010" name="S06.Pause.Number2"/>
           <p:cNvSpPr/>
           <p:nvPr/>
         </p:nvSpPr>
         <p:spPr>
           <a:xfrm>
-            <a:off x="411480" y="2432304"/>
-            <a:ext cx="82296" cy="82296"/>
+            <a:off x="393192" y="5272169"/>
+            <a:ext cx="292608" cy="292608"/>
           </a:xfrm>
           <a:prstGeom prst="ellipse">
             <a:avLst/>
@@ -1000,46 +1167,50 @@
           </a:ln>
         </p:spPr>
         <p:txBody>
+          <a:bodyPr lIns="0" tIns="0" rIns="0" bIns="0" anchor="ctr">
+            <a:noAutofit/>
+          </a:bodyPr>
+          <a:lstStyle/>
+          <a:p>
+            <a:pPr algn="ctr"/>
+            <a:r>
+              <a:rPr lang="en-US" sz="1400" b="1">
+                <a:solidFill>
+                  <a:srgbClr val="FFFFFF"/>
+                </a:solidFill>
+                <a:latin typeface="Arial"/>
+                <a:ea typeface="Arial"/>
+              </a:rPr>
+              <a:t>2</a:t>
+            </a:r>
+          </a:p>
+        </p:txBody>
+      </p:sp>
+      <p:sp>
+        <p:nvSpPr>
+          <p:cNvPr id="100011" name="S06.Pause.Text2"/>
+          <p:cNvSpPr txBox="1"/>
+          <p:nvPr/>
+        </p:nvSpPr>
+        <p:spPr>
+          <a:xfrm>
+            <a:off x="832104" y="5263025"/>
+            <a:ext cx="3044952" cy="438912"/>
+          </a:xfrm>
+          <a:prstGeom prst="rect">
+            <a:avLst/>
+          </a:prstGeom>
+          <a:noFill/>
+          <a:ln>
+            <a:noFill/>
+          </a:ln>
+        </p:spPr>
+        <p:txBody>
           <a:bodyPr lIns="0" tIns="0" rIns="0" bIns="0">
             <a:noAutofit/>
           </a:bodyPr>
           <a:lstStyle/>
           <a:p>
-            <a:endParaRPr lang="en-US" sz="1800">
-              <a:solidFill>
-                <a:srgbClr val="20354A"/>
-              </a:solidFill>
-              <a:latin typeface="Arial"/>
-              <a:ea typeface="Arial"/>
-            </a:endParaRPr>
-          </a:p>
-        </p:txBody>
-      </p:sp>
-      <p:sp>
-        <p:nvSpPr>
-          <p:cNvPr id="100005" name="S06.Execution.Text2"/>
-          <p:cNvSpPr txBox="1"/>
-          <p:nvPr/>
-        </p:nvSpPr>
-        <p:spPr>
-          <a:xfrm>
-            <a:off x="621792" y="2331720"/>
-            <a:ext cx="3273552" cy="548640"/>
-          </a:xfrm>
-          <a:prstGeom prst="rect">
-            <a:avLst/>
-          </a:prstGeom>
-          <a:noFill/>
-          <a:ln>
-            <a:noFill/>
-          </a:ln>
-        </p:spPr>
-        <p:txBody>
-          <a:bodyPr lIns="0" tIns="0" rIns="0" bIns="0">
-            <a:noAutofit/>
-          </a:bodyPr>
-          <a:lstStyle/>
-          <a:p>
             <a:r>
               <a:rPr lang="en-US" sz="1800">
                 <a:solidFill>
@@ -1048,96 +1219,20 @@
                 <a:latin typeface="Arial"/>
                 <a:ea typeface="Arial"/>
               </a:rPr>
-              <a:t>Optimized communication flow</a:t>
-            </a:r>
-          </a:p>
-        </p:txBody>
-      </p:sp>
-      <p:sp>
-        <p:nvSpPr>
-          <p:cNvPr id="100006" name="S06.Execution.Attribution"/>
-          <p:cNvSpPr txBox="1"/>
-          <p:nvPr/>
-        </p:nvSpPr>
-        <p:spPr>
-          <a:xfrm>
-            <a:off x="621792" y="2862072"/>
-            <a:ext cx="3273552" cy="347472"/>
-          </a:xfrm>
-          <a:prstGeom prst="rect">
-            <a:avLst/>
-          </a:prstGeom>
-          <a:noFill/>
-          <a:ln>
-            <a:noFill/>
-          </a:ln>
-        </p:spPr>
-        <p:txBody>
-          <a:bodyPr lIns="0" tIns="0" rIns="0" bIns="0">
-            <a:noAutofit/>
-          </a:bodyPr>
-          <a:lstStyle/>
-          <a:p>
-            <a:r>
-              <a:rPr lang="en-US" sz="1400">
-                <a:solidFill>
-                  <a:srgbClr val="607184"/>
-                </a:solidFill>
-                <a:latin typeface="Arial"/>
-                <a:ea typeface="Arial"/>
-              </a:rPr>
-              <a:t>Based on DUOHUAFEN</a:t>
-            </a:r>
-          </a:p>
-        </p:txBody>
-      </p:sp>
-      <p:sp>
-        <p:nvSpPr>
-          <p:cNvPr id="100007" name="S06.Pause.Heading"/>
-          <p:cNvSpPr txBox="1"/>
-          <p:nvPr/>
-        </p:nvSpPr>
-        <p:spPr>
-          <a:xfrm>
-            <a:off x="320040" y="3767328"/>
-            <a:ext cx="3657600" cy="640080"/>
-          </a:xfrm>
-          <a:prstGeom prst="rect">
-            <a:avLst/>
-          </a:prstGeom>
-          <a:noFill/>
-          <a:ln>
-            <a:noFill/>
-          </a:ln>
-        </p:spPr>
-        <p:txBody>
-          <a:bodyPr lIns="0" tIns="0" rIns="0" bIns="0">
-            <a:noAutofit/>
-          </a:bodyPr>
-          <a:lstStyle/>
-          <a:p>
-            <a:r>
-              <a:rPr lang="en-US" sz="2200" b="1">
-                <a:solidFill>
-                  <a:srgbClr val="183B56"/>
-                </a:solidFill>
-                <a:latin typeface="Arial"/>
-                <a:ea typeface="Arial"/>
-              </a:rPr>
-              <a:t>Cycle-Consistent Pause</a:t>
-            </a:r>
-          </a:p>
-        </p:txBody>
-      </p:sp>
-      <p:sp>
-        <p:nvSpPr>
-          <p:cNvPr id="100008" name="S06.Pause.Number1"/>
+              <a:t>Set a common target</a:t>
+            </a:r>
+          </a:p>
+        </p:txBody>
+      </p:sp>
+      <p:sp>
+        <p:nvSpPr>
+          <p:cNvPr id="100012" name="S06.Pause.Number3"/>
           <p:cNvSpPr/>
           <p:nvPr/>
         </p:nvSpPr>
         <p:spPr>
           <a:xfrm>
-            <a:off x="393192" y="4498848"/>
+            <a:off x="393192" y="5784233"/>
             <a:ext cx="292608" cy="292608"/>
           </a:xfrm>
           <a:prstGeom prst="ellipse">
@@ -1165,164 +1260,6 @@
                 <a:latin typeface="Arial"/>
                 <a:ea typeface="Arial"/>
               </a:rPr>
-              <a:t>1</a:t>
-            </a:r>
-          </a:p>
-        </p:txBody>
-      </p:sp>
-      <p:sp>
-        <p:nvSpPr>
-          <p:cNvPr id="100009" name="S06.Pause.Text1"/>
-          <p:cNvSpPr txBox="1"/>
-          <p:nvPr/>
-        </p:nvSpPr>
-        <p:spPr>
-          <a:xfrm>
-            <a:off x="832104" y="4489704"/>
-            <a:ext cx="3044952" cy="438912"/>
-          </a:xfrm>
-          <a:prstGeom prst="rect">
-            <a:avLst/>
-          </a:prstGeom>
-          <a:noFill/>
-          <a:ln>
-            <a:noFill/>
-          </a:ln>
-        </p:spPr>
-        <p:txBody>
-          <a:bodyPr lIns="0" tIns="0" rIns="0" bIns="0">
-            <a:noAutofit/>
-          </a:bodyPr>
-          <a:lstStyle/>
-          <a:p>
-            <a:r>
-              <a:rPr lang="en-US" sz="1800">
-                <a:solidFill>
-                  <a:srgbClr val="20354A"/>
-                </a:solidFill>
-                <a:latin typeface="Arial"/>
-                <a:ea typeface="Arial"/>
-              </a:rPr>
-              <a:t>Stabilize progress</a:t>
-            </a:r>
-          </a:p>
-        </p:txBody>
-      </p:sp>
-      <p:sp>
-        <p:nvSpPr>
-          <p:cNvPr id="100010" name="S06.Pause.Number2"/>
-          <p:cNvSpPr/>
-          <p:nvPr/>
-        </p:nvSpPr>
-        <p:spPr>
-          <a:xfrm>
-            <a:off x="393192" y="5010912"/>
-            <a:ext cx="292608" cy="292608"/>
-          </a:xfrm>
-          <a:prstGeom prst="ellipse">
-            <a:avLst/>
-          </a:prstGeom>
-          <a:solidFill>
-            <a:srgbClr val="008C95"/>
-          </a:solidFill>
-          <a:ln>
-            <a:noFill/>
-          </a:ln>
-        </p:spPr>
-        <p:txBody>
-          <a:bodyPr lIns="0" tIns="0" rIns="0" bIns="0" anchor="ctr">
-            <a:noAutofit/>
-          </a:bodyPr>
-          <a:lstStyle/>
-          <a:p>
-            <a:pPr algn="ctr"/>
-            <a:r>
-              <a:rPr lang="en-US" sz="1400" b="1">
-                <a:solidFill>
-                  <a:srgbClr val="FFFFFF"/>
-                </a:solidFill>
-                <a:latin typeface="Arial"/>
-                <a:ea typeface="Arial"/>
-              </a:rPr>
-              <a:t>2</a:t>
-            </a:r>
-          </a:p>
-        </p:txBody>
-      </p:sp>
-      <p:sp>
-        <p:nvSpPr>
-          <p:cNvPr id="100011" name="S06.Pause.Text2"/>
-          <p:cNvSpPr txBox="1"/>
-          <p:nvPr/>
-        </p:nvSpPr>
-        <p:spPr>
-          <a:xfrm>
-            <a:off x="832104" y="5001768"/>
-            <a:ext cx="3044952" cy="438912"/>
-          </a:xfrm>
-          <a:prstGeom prst="rect">
-            <a:avLst/>
-          </a:prstGeom>
-          <a:noFill/>
-          <a:ln>
-            <a:noFill/>
-          </a:ln>
-        </p:spPr>
-        <p:txBody>
-          <a:bodyPr lIns="0" tIns="0" rIns="0" bIns="0">
-            <a:noAutofit/>
-          </a:bodyPr>
-          <a:lstStyle/>
-          <a:p>
-            <a:r>
-              <a:rPr lang="en-US" sz="1800">
-                <a:solidFill>
-                  <a:srgbClr val="20354A"/>
-                </a:solidFill>
-                <a:latin typeface="Arial"/>
-                <a:ea typeface="Arial"/>
-              </a:rPr>
-              <a:t>Set a common target</a:t>
-            </a:r>
-          </a:p>
-        </p:txBody>
-      </p:sp>
-      <p:sp>
-        <p:nvSpPr>
-          <p:cNvPr id="100012" name="S06.Pause.Number3"/>
-          <p:cNvSpPr/>
-          <p:nvPr/>
-        </p:nvSpPr>
-        <p:spPr>
-          <a:xfrm>
-            <a:off x="393192" y="5522976"/>
-            <a:ext cx="292608" cy="292608"/>
-          </a:xfrm>
-          <a:prstGeom prst="ellipse">
-            <a:avLst/>
-          </a:prstGeom>
-          <a:solidFill>
-            <a:srgbClr val="008C95"/>
-          </a:solidFill>
-          <a:ln>
-            <a:noFill/>
-          </a:ln>
-        </p:spPr>
-        <p:txBody>
-          <a:bodyPr lIns="0" tIns="0" rIns="0" bIns="0" anchor="ctr">
-            <a:noAutofit/>
-          </a:bodyPr>
-          <a:lstStyle/>
-          <a:p>
-            <a:pPr algn="ctr"/>
-            <a:r>
-              <a:rPr lang="en-US" sz="1400" b="1">
-                <a:solidFill>
-                  <a:srgbClr val="FFFFFF"/>
-                </a:solidFill>
-                <a:latin typeface="Arial"/>
-                <a:ea typeface="Arial"/>
-              </a:rPr>
               <a:t>3</a:t>
             </a:r>
           </a:p>
@@ -1336,7 +1273,7 @@
         </p:nvSpPr>
         <p:spPr>
           <a:xfrm>
-            <a:off x="832104" y="5513832"/>
+            <a:off x="832104" y="5775089"/>
             <a:ext cx="3044952" cy="438912"/>
           </a:xfrm>
           <a:prstGeom prst="rect">
@@ -1375,16 +1312,16 @@
           <p:nvPr/>
         </p:nvPicPr>
         <p:blipFill>
-          <a:blip xmlns:r="http://schemas.openxmlformats.org/officeDocument/2006/relationships" r:embed="Rea51772dd4ee4e21"/>
-          <a:srcRect l="35526" t="12752" r="1076" b="9670"/>
+          <a:blip xmlns:r="http://schemas.openxmlformats.org/officeDocument/2006/relationships" r:embed="Rc6f3db6c3e55461b"/>
+          <a:srcRect l="35526" t="12752" r="1076" b="13846"/>
           <a:stretch>
             <a:fillRect/>
           </a:stretch>
         </p:blipFill>
         <p:spPr>
           <a:xfrm>
-            <a:off x="4114800" y="1024128"/>
-            <a:ext cx="7754112" cy="5340096"/>
+            <a:off x="4123944" y="1186107"/>
+            <a:ext cx="7754112" cy="5052713"/>
           </a:xfrm>
           <a:prstGeom prst="rect">
             <a:avLst/>
@@ -1426,6 +1363,105 @@
                 <a:ea typeface="Arial"/>
               </a:rPr>
               <a:t>6</a:t>
+            </a:r>
+          </a:p>
+        </p:txBody>
+      </p:sp>
+      <p:sp>
+        <p:nvSpPr>
+          <p:cNvPr id="100016" name="S06.Execution.Reduction"/>
+          <p:cNvSpPr txBox="1"/>
+          <p:nvPr/>
+        </p:nvSpPr>
+        <p:spPr>
+          <a:xfrm>
+            <a:off x="406556" y="3163824"/>
+            <a:ext cx="3552795" cy="548640"/>
+          </a:xfrm>
+          <a:prstGeom prst="rect">
+            <a:avLst/>
+          </a:prstGeom>
+          <a:noFill/>
+          <a:ln>
+            <a:noFill/>
+          </a:ln>
+        </p:spPr>
+        <p:txBody>
+          <a:bodyPr lIns="0" tIns="0" rIns="0" bIns="0">
+            <a:noAutofit/>
+          </a:bodyPr>
+          <a:lstStyle/>
+          <a:p>
+            <a:pPr marL="285750" indent="-285750">
+              <a:buFont xmlns:a="http://schemas.openxmlformats.org/drawingml/2006/main" typeface="Arial" panose="020B0604020202020204" pitchFamily="34" charset="0"/>
+              <a:buChar xmlns:a="http://schemas.openxmlformats.org/drawingml/2006/main" char="•"/>
+              <a:defRPr>
+                <a:solidFill>
+                  <a:srgbClr val="20354A"/>
+                </a:solidFill>
+              </a:defRPr>
+            </a:pPr>
+            <a:r>
+              <a:rPr lang="en-US">
+                <a:solidFill>
+                  <a:srgbClr val="20354A"/>
+                </a:solidFill>
+              </a:rPr>
+              <a:t>Reduce once</a:t>
+            </a:r>
+            <a:r>
+              <a:rPr lang="en-US">
+                <a:solidFill>
+                  <a:srgbClr val="20354A"/>
+                </a:solidFill>
+              </a:rPr>
+              <a:t xml:space="preserve"> </a:t>
+            </a:r>
+            <a:r>
+              <a:rPr lang="en-US">
+                <a:solidFill>
+                  <a:srgbClr val="20354A"/>
+                </a:solidFill>
+              </a:rPr>
+              <a:t>data exchange  per cycle</a:t>
+            </a:r>
+          </a:p>
+        </p:txBody>
+      </p:sp>
+      <p:sp>
+        <p:nvSpPr>
+          <p:cNvPr id="100017" name="S06.Reference1"/>
+          <p:cNvSpPr txBox="1"/>
+          <p:nvPr/>
+        </p:nvSpPr>
+        <p:spPr>
+          <a:xfrm>
+            <a:off x="365760" y="6455664"/>
+            <a:ext cx="11109960" cy="256032"/>
+          </a:xfrm>
+          <a:prstGeom prst="rect">
+            <a:avLst/>
+          </a:prstGeom>
+          <a:noFill/>
+          <a:ln>
+            <a:noFill/>
+          </a:ln>
+        </p:spPr>
+        <p:txBody>
+          <a:bodyPr lIns="0" tIns="0" rIns="0" bIns="0">
+            <a:noAutofit/>
+          </a:bodyPr>
+          <a:lstStyle/>
+          <a:p>
+            <a:r>
+              <a:rPr lang="en-US" sz="1000">
+                <a:solidFill>
+                  <a:srgbClr val="607184"/>
+                </a:solidFill>
+                <a:latin typeface="Arial"/>
+                <a:ea typeface="Arial"/>
+              </a:rPr>
+              <a:t>[1] G. Zhu. Cross-Node Deployment of Digital Logic Design for FPGA Cloud. Master's thesis, ShanghaiTech University, 2024.</a:t>
             </a:r>
           </a:p>
         </p:txBody>

--- a/pptx/midterm/REMUS_Progress_Slide_6.pptx
+++ b/pptx/midterm/REMUS_Progress_Slide_6.pptx
@@ -5,10 +5,10 @@
     <p:sldMasterId xmlns:r="http://schemas.openxmlformats.org/officeDocument/2006/relationships" id="2147483648" r:id="rId1"/>
   </p:sldMasterIdLst>
   <p:notesMasterIdLst>
-    <p:notesMasterId r:id="R0f26bd88ac384b1f"/>
+    <p:notesMasterId r:id="R0a9a43760c634d5d"/>
   </p:notesMasterIdLst>
   <p:sldIdLst>
-    <p:sldId id="256" r:id="R70c63acfe049485b"/>
+    <p:sldId id="256" r:id="R13a56f0257c443c6"/>
   </p:sldIdLst>
   <p:sldSz cx="12192000" cy="6858000" type="screen16x9"/>
   <p:notesSz cx="6858000" cy="9144000"/>
@@ -337,13 +337,13 @@
         <a:srgbClr val="E7E6E6"/>
       </a:lt2>
       <a:accent1>
-        <a:srgbClr val="183B56"/>
+        <a:srgbClr val="C00000"/>
       </a:accent1>
       <a:accent2>
-        <a:srgbClr val="008C95"/>
+        <a:srgbClr val="70AD47"/>
       </a:accent2>
       <a:accent3>
-        <a:srgbClr val="DF973E"/>
+        <a:srgbClr val="ED7D31"/>
       </a:accent3>
       <a:accent4>
         <a:srgbClr val="FFC000"/>
@@ -821,7 +821,7 @@
               </a:lnSpc>
               <a:defRPr sz="3000" b="1">
                 <a:solidFill>
-                  <a:srgbClr val="183B56"/>
+                  <a:srgbClr val="C00000"/>
                 </a:solidFill>
                 <a:latin typeface="Arial"/>
                 <a:ea typeface="Arial"/>
@@ -830,7 +830,7 @@
             <a:r>
               <a:rPr sz="3000" b="1">
                 <a:solidFill>
-                  <a:srgbClr val="183B56"/>
+                  <a:srgbClr val="C00000"/>
                 </a:solidFill>
                 <a:latin typeface="Arial"/>
               </a:rPr>
@@ -854,38 +854,350 @@
             <a:avLst/>
           </a:prstGeom>
           <a:solidFill>
-            <a:srgbClr val="008C95"/>
+            <a:srgbClr val="C55A11"/>
+          </a:solidFill>
+          <a:ln>
+            <a:solidFill>
+              <a:srgbClr val="C55A11"/>
+            </a:solidFill>
+          </a:ln>
+        </p:spPr>
+        <p:txBody>
+          <a:bodyPr lIns="0" tIns="0" rIns="0" bIns="0">
+            <a:noAutofit/>
+          </a:bodyPr>
+          <a:lstStyle/>
+          <a:p>
+            <a:endParaRPr lang="en-US" sz="1800">
+              <a:solidFill>
+                <a:srgbClr val="C55A11"/>
+              </a:solidFill>
+              <a:latin typeface="Arial"/>
+              <a:ea typeface="Arial"/>
+            </a:endParaRPr>
+          </a:p>
+        </p:txBody>
+      </p:sp>
+      <p:sp>
+        <p:nvSpPr>
+          <p:cNvPr id="100001" name="S06.Execution.Heading"/>
+          <p:cNvSpPr txBox="1"/>
+          <p:nvPr/>
+        </p:nvSpPr>
+        <p:spPr>
+          <a:xfrm>
+            <a:off x="320040" y="1143000"/>
+            <a:ext cx="3657600" cy="640080"/>
+          </a:xfrm>
+          <a:prstGeom prst="rect">
+            <a:avLst/>
+          </a:prstGeom>
+          <a:noFill/>
+          <a:ln>
+            <a:noFill/>
+          </a:ln>
+        </p:spPr>
+        <p:txBody>
+          <a:bodyPr lIns="0" tIns="0" rIns="0" bIns="0">
+            <a:noAutofit/>
+          </a:bodyPr>
+          <a:lstStyle/>
+          <a:p>
+            <a:r>
+              <a:rPr lang="en-US" sz="2200" b="1">
+                <a:solidFill>
+                  <a:srgbClr val="333333"/>
+                </a:solidFill>
+                <a:latin typeface="Arial"/>
+                <a:ea typeface="Arial"/>
+              </a:rPr>
+              <a:t>Cycle-Accurate Execution</a:t>
+            </a:r>
+          </a:p>
+        </p:txBody>
+      </p:sp>
+      <p:sp>
+        <p:nvSpPr>
+          <p:cNvPr id="100003" name="S06.Execution.Text1"/>
+          <p:cNvSpPr txBox="1"/>
+          <p:nvPr/>
+        </p:nvSpPr>
+        <p:spPr>
+          <a:xfrm>
+            <a:off x="424844" y="1856232"/>
+            <a:ext cx="3642111" cy="548640"/>
+          </a:xfrm>
+          <a:prstGeom prst="rect">
+            <a:avLst/>
+          </a:prstGeom>
+          <a:noFill/>
+          <a:ln>
+            <a:noFill/>
+          </a:ln>
+        </p:spPr>
+        <p:txBody>
+          <a:bodyPr lIns="0" tIns="0" rIns="0" bIns="0">
+            <a:noAutofit/>
+          </a:bodyPr>
+          <a:lstStyle/>
+          <a:p>
+            <a:pPr marL="285750" indent="-285750" algn="l">
+              <a:buFont xmlns:a="http://schemas.openxmlformats.org/drawingml/2006/main" typeface="Arial" panose="020B0604020202020204" pitchFamily="34" charset="0"/>
+              <a:buChar xmlns:a="http://schemas.openxmlformats.org/drawingml/2006/main" char="•"/>
+              <a:defRPr sz="1800" b="0">
+                <a:solidFill>
+                  <a:srgbClr val="1F1F1F"/>
+                </a:solidFill>
+                <a:latin typeface="Arial"/>
+                <a:ea typeface="Arial"/>
+              </a:defRPr>
+            </a:pPr>
+            <a:r>
+              <a:rPr lang="en-US">
+                <a:solidFill>
+                  <a:srgbClr val="1F1F1F"/>
+                </a:solidFill>
+                <a:latin typeface="Arial"/>
+              </a:rPr>
+              <a:t>Execution b</a:t>
+            </a:r>
+            <a:r>
+              <a:rPr lang="en-US" sz="1800">
+                <a:solidFill>
+                  <a:srgbClr val="1F1F1F"/>
+                </a:solidFill>
+                <a:latin typeface="Arial"/>
+              </a:rPr>
+              <a:t>ased on DUOHUAFEN LI-TDM</a:t>
+            </a:r>
+            <a:r>
+              <a:rPr lang="en-US" baseline="30000">
+                <a:solidFill>
+                  <a:srgbClr val="1F1F1F"/>
+                </a:solidFill>
+                <a:latin typeface="Arial"/>
+              </a:rPr>
+              <a:t>[1]</a:t>
+            </a:r>
+          </a:p>
+        </p:txBody>
+      </p:sp>
+      <p:sp>
+        <p:nvSpPr>
+          <p:cNvPr id="100005" name="S06.Execution.Text2"/>
+          <p:cNvSpPr txBox="1"/>
+          <p:nvPr/>
+        </p:nvSpPr>
+        <p:spPr>
+          <a:xfrm>
+            <a:off x="406556" y="2589160"/>
+            <a:ext cx="3552795" cy="548640"/>
+          </a:xfrm>
+          <a:prstGeom prst="rect">
+            <a:avLst/>
+          </a:prstGeom>
+          <a:noFill/>
+          <a:ln>
+            <a:noFill/>
+          </a:ln>
+        </p:spPr>
+        <p:txBody>
+          <a:bodyPr lIns="0" tIns="0" rIns="0" bIns="0">
+            <a:noAutofit/>
+          </a:bodyPr>
+          <a:lstStyle/>
+          <a:p>
+            <a:pPr marL="285750" indent="-285750" algn="l">
+              <a:buFont xmlns:a="http://schemas.openxmlformats.org/drawingml/2006/main" typeface="Arial" panose="020B0604020202020204" pitchFamily="34" charset="0"/>
+              <a:buChar xmlns:a="http://schemas.openxmlformats.org/drawingml/2006/main" char="•"/>
+              <a:defRPr sz="1800" b="0">
+                <a:solidFill>
+                  <a:srgbClr val="1F1F1F"/>
+                </a:solidFill>
+                <a:latin typeface="Arial"/>
+                <a:ea typeface="Arial"/>
+              </a:defRPr>
+            </a:pPr>
+            <a:r>
+              <a:rPr sz="1800">
+                <a:solidFill>
+                  <a:srgbClr val="1F1F1F"/>
+                </a:solidFill>
+                <a:latin typeface="Arial"/>
+              </a:rPr>
+              <a:t>Optimized communication flow</a:t>
+            </a:r>
+          </a:p>
+        </p:txBody>
+      </p:sp>
+      <p:sp>
+        <p:nvSpPr>
+          <p:cNvPr id="100007" name="S06.Pause.Heading"/>
+          <p:cNvSpPr txBox="1"/>
+          <p:nvPr/>
+        </p:nvSpPr>
+        <p:spPr>
+          <a:xfrm>
+            <a:off x="320040" y="4028585"/>
+            <a:ext cx="3657600" cy="640080"/>
+          </a:xfrm>
+          <a:prstGeom prst="rect">
+            <a:avLst/>
+          </a:prstGeom>
+          <a:noFill/>
+          <a:ln>
+            <a:noFill/>
+          </a:ln>
+        </p:spPr>
+        <p:txBody>
+          <a:bodyPr lIns="0" tIns="0" rIns="0" bIns="0">
+            <a:noAutofit/>
+          </a:bodyPr>
+          <a:lstStyle/>
+          <a:p>
+            <a:r>
+              <a:rPr lang="en-US" sz="2200" b="1">
+                <a:solidFill>
+                  <a:srgbClr val="333333"/>
+                </a:solidFill>
+                <a:latin typeface="Arial"/>
+                <a:ea typeface="Arial"/>
+              </a:rPr>
+              <a:t>Cycle-Consistent Pause</a:t>
+            </a:r>
+          </a:p>
+        </p:txBody>
+      </p:sp>
+      <p:sp>
+        <p:nvSpPr>
+          <p:cNvPr id="100008" name="S06.Pause.Number1"/>
+          <p:cNvSpPr/>
+          <p:nvPr/>
+        </p:nvSpPr>
+        <p:spPr>
+          <a:xfrm>
+            <a:off x="393192" y="4760105"/>
+            <a:ext cx="292608" cy="292608"/>
+          </a:xfrm>
+          <a:prstGeom prst="ellipse">
+            <a:avLst/>
+          </a:prstGeom>
+          <a:solidFill>
+            <a:srgbClr val="70AD47"/>
           </a:solidFill>
           <a:ln>
             <a:noFill/>
           </a:ln>
         </p:spPr>
         <p:txBody>
+          <a:bodyPr lIns="0" tIns="0" rIns="0" bIns="0" anchor="ctr">
+            <a:noAutofit/>
+          </a:bodyPr>
+          <a:lstStyle/>
+          <a:p>
+            <a:pPr algn="ctr"/>
+            <a:r>
+              <a:rPr lang="en-US" sz="1400" b="1">
+                <a:solidFill>
+                  <a:srgbClr val="FFFFFF"/>
+                </a:solidFill>
+                <a:latin typeface="Arial"/>
+                <a:ea typeface="Arial"/>
+              </a:rPr>
+              <a:t>1</a:t>
+            </a:r>
+          </a:p>
+        </p:txBody>
+      </p:sp>
+      <p:sp>
+        <p:nvSpPr>
+          <p:cNvPr id="100009" name="S06.Pause.Text1"/>
+          <p:cNvSpPr txBox="1"/>
+          <p:nvPr/>
+        </p:nvSpPr>
+        <p:spPr>
+          <a:xfrm>
+            <a:off x="832104" y="4750961"/>
+            <a:ext cx="3044952" cy="438912"/>
+          </a:xfrm>
+          <a:prstGeom prst="rect">
+            <a:avLst/>
+          </a:prstGeom>
+          <a:noFill/>
+          <a:ln>
+            <a:noFill/>
+          </a:ln>
+        </p:spPr>
+        <p:txBody>
           <a:bodyPr lIns="0" tIns="0" rIns="0" bIns="0">
             <a:noAutofit/>
           </a:bodyPr>
           <a:lstStyle/>
           <a:p>
-            <a:endParaRPr lang="en-US" sz="1800">
-              <a:solidFill>
-                <a:srgbClr val="20354A"/>
-              </a:solidFill>
-              <a:latin typeface="Arial"/>
-              <a:ea typeface="Arial"/>
-            </a:endParaRPr>
-          </a:p>
-        </p:txBody>
-      </p:sp>
-      <p:sp>
-        <p:nvSpPr>
-          <p:cNvPr id="100001" name="S06.Execution.Heading"/>
+            <a:r>
+              <a:rPr lang="en-US" sz="1800">
+                <a:solidFill>
+                  <a:srgbClr val="1F1F1F"/>
+                </a:solidFill>
+                <a:latin typeface="Arial"/>
+                <a:ea typeface="Arial"/>
+              </a:rPr>
+              <a:t>Stabilize progress</a:t>
+            </a:r>
+          </a:p>
+        </p:txBody>
+      </p:sp>
+      <p:sp>
+        <p:nvSpPr>
+          <p:cNvPr id="100010" name="S06.Pause.Number2"/>
+          <p:cNvSpPr/>
+          <p:nvPr/>
+        </p:nvSpPr>
+        <p:spPr>
+          <a:xfrm>
+            <a:off x="393192" y="5272169"/>
+            <a:ext cx="292608" cy="292608"/>
+          </a:xfrm>
+          <a:prstGeom prst="ellipse">
+            <a:avLst/>
+          </a:prstGeom>
+          <a:solidFill>
+            <a:srgbClr val="70AD47"/>
+          </a:solidFill>
+          <a:ln>
+            <a:noFill/>
+          </a:ln>
+        </p:spPr>
+        <p:txBody>
+          <a:bodyPr lIns="0" tIns="0" rIns="0" bIns="0" anchor="ctr">
+            <a:noAutofit/>
+          </a:bodyPr>
+          <a:lstStyle/>
+          <a:p>
+            <a:pPr algn="ctr"/>
+            <a:r>
+              <a:rPr lang="en-US" sz="1400" b="1">
+                <a:solidFill>
+                  <a:srgbClr val="FFFFFF"/>
+                </a:solidFill>
+                <a:latin typeface="Arial"/>
+                <a:ea typeface="Arial"/>
+              </a:rPr>
+              <a:t>2</a:t>
+            </a:r>
+          </a:p>
+        </p:txBody>
+      </p:sp>
+      <p:sp>
+        <p:nvSpPr>
+          <p:cNvPr id="100011" name="S06.Pause.Text2"/>
           <p:cNvSpPr txBox="1"/>
           <p:nvPr/>
         </p:nvSpPr>
         <p:spPr>
           <a:xfrm>
-            <a:off x="320040" y="1143000"/>
-            <a:ext cx="3657600" cy="640080"/>
+            <a:off x="832104" y="5263025"/>
+            <a:ext cx="3044952" cy="438912"/>
           </a:xfrm>
           <a:prstGeom prst="rect">
             <a:avLst/>
@@ -902,28 +1214,69 @@
           <a:lstStyle/>
           <a:p>
             <a:r>
-              <a:rPr lang="en-US" sz="2200" b="1">
-                <a:solidFill>
-                  <a:srgbClr val="183B56"/>
+              <a:rPr lang="en-US" sz="1800">
+                <a:solidFill>
+                  <a:srgbClr val="1F1F1F"/>
                 </a:solidFill>
                 <a:latin typeface="Arial"/>
                 <a:ea typeface="Arial"/>
               </a:rPr>
-              <a:t>Cycle-Accurate Execution</a:t>
-            </a:r>
-          </a:p>
-        </p:txBody>
-      </p:sp>
-      <p:sp>
-        <p:nvSpPr>
-          <p:cNvPr id="100003" name="S06.Execution.Text1"/>
+              <a:t>Set a common target</a:t>
+            </a:r>
+          </a:p>
+        </p:txBody>
+      </p:sp>
+      <p:sp>
+        <p:nvSpPr>
+          <p:cNvPr id="100012" name="S06.Pause.Number3"/>
+          <p:cNvSpPr/>
+          <p:nvPr/>
+        </p:nvSpPr>
+        <p:spPr>
+          <a:xfrm>
+            <a:off x="393192" y="5784233"/>
+            <a:ext cx="292608" cy="292608"/>
+          </a:xfrm>
+          <a:prstGeom prst="ellipse">
+            <a:avLst/>
+          </a:prstGeom>
+          <a:solidFill>
+            <a:srgbClr val="70AD47"/>
+          </a:solidFill>
+          <a:ln>
+            <a:noFill/>
+          </a:ln>
+        </p:spPr>
+        <p:txBody>
+          <a:bodyPr lIns="0" tIns="0" rIns="0" bIns="0" anchor="ctr">
+            <a:noAutofit/>
+          </a:bodyPr>
+          <a:lstStyle/>
+          <a:p>
+            <a:pPr algn="ctr"/>
+            <a:r>
+              <a:rPr lang="en-US" sz="1400" b="1">
+                <a:solidFill>
+                  <a:srgbClr val="FFFFFF"/>
+                </a:solidFill>
+                <a:latin typeface="Arial"/>
+                <a:ea typeface="Arial"/>
+              </a:rPr>
+              <a:t>3</a:t>
+            </a:r>
+          </a:p>
+        </p:txBody>
+      </p:sp>
+      <p:sp>
+        <p:nvSpPr>
+          <p:cNvPr id="100013" name="S06.Pause.Text3"/>
           <p:cNvSpPr txBox="1"/>
           <p:nvPr/>
         </p:nvSpPr>
         <p:spPr>
           <a:xfrm>
-            <a:off x="424844" y="1856232"/>
-            <a:ext cx="3642111" cy="548640"/>
+            <a:off x="832104" y="5775089"/>
+            <a:ext cx="3044952" cy="438912"/>
           </a:xfrm>
           <a:prstGeom prst="rect">
             <a:avLst/>
@@ -939,361 +1292,10 @@
           </a:bodyPr>
           <a:lstStyle/>
           <a:p>
-            <a:pPr marL="285750" indent="-285750" algn="l">
-              <a:buFont xmlns:a="http://schemas.openxmlformats.org/drawingml/2006/main" typeface="Arial" panose="020B0604020202020204" pitchFamily="34" charset="0"/>
-              <a:buChar xmlns:a="http://schemas.openxmlformats.org/drawingml/2006/main" char="•"/>
-              <a:defRPr sz="1800" b="0">
-                <a:solidFill>
-                  <a:srgbClr val="20354A"/>
-                </a:solidFill>
-                <a:latin typeface="Arial"/>
-                <a:ea typeface="Arial"/>
-              </a:defRPr>
-            </a:pPr>
-            <a:r>
-              <a:rPr lang="en-US">
-                <a:solidFill>
-                  <a:srgbClr val="20354A"/>
-                </a:solidFill>
-                <a:latin typeface="Arial"/>
-              </a:rPr>
-              <a:t>Execution b</a:t>
-            </a:r>
             <a:r>
               <a:rPr lang="en-US" sz="1800">
                 <a:solidFill>
-                  <a:srgbClr val="20354A"/>
-                </a:solidFill>
-                <a:latin typeface="Arial"/>
-              </a:rPr>
-              <a:t>ased on DUOHUAFEN LI-TDM</a:t>
-            </a:r>
-            <a:r>
-              <a:rPr lang="en-US" baseline="30000">
-                <a:solidFill>
-                  <a:srgbClr val="20354A"/>
-                </a:solidFill>
-                <a:latin typeface="Arial"/>
-              </a:rPr>
-              <a:t>[1]</a:t>
-            </a:r>
-          </a:p>
-        </p:txBody>
-      </p:sp>
-      <p:sp>
-        <p:nvSpPr>
-          <p:cNvPr id="100005" name="S06.Execution.Text2"/>
-          <p:cNvSpPr txBox="1"/>
-          <p:nvPr/>
-        </p:nvSpPr>
-        <p:spPr>
-          <a:xfrm>
-            <a:off x="406556" y="2589160"/>
-            <a:ext cx="3552795" cy="548640"/>
-          </a:xfrm>
-          <a:prstGeom prst="rect">
-            <a:avLst/>
-          </a:prstGeom>
-          <a:noFill/>
-          <a:ln>
-            <a:noFill/>
-          </a:ln>
-        </p:spPr>
-        <p:txBody>
-          <a:bodyPr lIns="0" tIns="0" rIns="0" bIns="0">
-            <a:noAutofit/>
-          </a:bodyPr>
-          <a:lstStyle/>
-          <a:p>
-            <a:pPr marL="285750" indent="-285750" algn="l">
-              <a:buFont xmlns:a="http://schemas.openxmlformats.org/drawingml/2006/main" typeface="Arial" panose="020B0604020202020204" pitchFamily="34" charset="0"/>
-              <a:buChar xmlns:a="http://schemas.openxmlformats.org/drawingml/2006/main" char="•"/>
-              <a:defRPr sz="1800" b="0">
-                <a:solidFill>
-                  <a:srgbClr val="20354A"/>
-                </a:solidFill>
-                <a:latin typeface="Arial"/>
-                <a:ea typeface="Arial"/>
-              </a:defRPr>
-            </a:pPr>
-            <a:r>
-              <a:rPr sz="1800">
-                <a:solidFill>
-                  <a:srgbClr val="20354A"/>
-                </a:solidFill>
-                <a:latin typeface="Arial"/>
-              </a:rPr>
-              <a:t>Optimized communication flow</a:t>
-            </a:r>
-          </a:p>
-        </p:txBody>
-      </p:sp>
-      <p:sp>
-        <p:nvSpPr>
-          <p:cNvPr id="100007" name="S06.Pause.Heading"/>
-          <p:cNvSpPr txBox="1"/>
-          <p:nvPr/>
-        </p:nvSpPr>
-        <p:spPr>
-          <a:xfrm>
-            <a:off x="320040" y="4028585"/>
-            <a:ext cx="3657600" cy="640080"/>
-          </a:xfrm>
-          <a:prstGeom prst="rect">
-            <a:avLst/>
-          </a:prstGeom>
-          <a:noFill/>
-          <a:ln>
-            <a:noFill/>
-          </a:ln>
-        </p:spPr>
-        <p:txBody>
-          <a:bodyPr lIns="0" tIns="0" rIns="0" bIns="0">
-            <a:noAutofit/>
-          </a:bodyPr>
-          <a:lstStyle/>
-          <a:p>
-            <a:r>
-              <a:rPr lang="en-US" sz="2200" b="1">
-                <a:solidFill>
-                  <a:srgbClr val="183B56"/>
-                </a:solidFill>
-                <a:latin typeface="Arial"/>
-                <a:ea typeface="Arial"/>
-              </a:rPr>
-              <a:t>Cycle-Consistent Pause</a:t>
-            </a:r>
-          </a:p>
-        </p:txBody>
-      </p:sp>
-      <p:sp>
-        <p:nvSpPr>
-          <p:cNvPr id="100008" name="S06.Pause.Number1"/>
-          <p:cNvSpPr/>
-          <p:nvPr/>
-        </p:nvSpPr>
-        <p:spPr>
-          <a:xfrm>
-            <a:off x="393192" y="4760105"/>
-            <a:ext cx="292608" cy="292608"/>
-          </a:xfrm>
-          <a:prstGeom prst="ellipse">
-            <a:avLst/>
-          </a:prstGeom>
-          <a:solidFill>
-            <a:srgbClr val="008C95"/>
-          </a:solidFill>
-          <a:ln>
-            <a:noFill/>
-          </a:ln>
-        </p:spPr>
-        <p:txBody>
-          <a:bodyPr lIns="0" tIns="0" rIns="0" bIns="0" anchor="ctr">
-            <a:noAutofit/>
-          </a:bodyPr>
-          <a:lstStyle/>
-          <a:p>
-            <a:pPr algn="ctr"/>
-            <a:r>
-              <a:rPr lang="en-US" sz="1400" b="1">
-                <a:solidFill>
-                  <a:srgbClr val="FFFFFF"/>
-                </a:solidFill>
-                <a:latin typeface="Arial"/>
-                <a:ea typeface="Arial"/>
-              </a:rPr>
-              <a:t>1</a:t>
-            </a:r>
-          </a:p>
-        </p:txBody>
-      </p:sp>
-      <p:sp>
-        <p:nvSpPr>
-          <p:cNvPr id="100009" name="S06.Pause.Text1"/>
-          <p:cNvSpPr txBox="1"/>
-          <p:nvPr/>
-        </p:nvSpPr>
-        <p:spPr>
-          <a:xfrm>
-            <a:off x="832104" y="4750961"/>
-            <a:ext cx="3044952" cy="438912"/>
-          </a:xfrm>
-          <a:prstGeom prst="rect">
-            <a:avLst/>
-          </a:prstGeom>
-          <a:noFill/>
-          <a:ln>
-            <a:noFill/>
-          </a:ln>
-        </p:spPr>
-        <p:txBody>
-          <a:bodyPr lIns="0" tIns="0" rIns="0" bIns="0">
-            <a:noAutofit/>
-          </a:bodyPr>
-          <a:lstStyle/>
-          <a:p>
-            <a:r>
-              <a:rPr lang="en-US" sz="1800">
-                <a:solidFill>
-                  <a:srgbClr val="20354A"/>
-                </a:solidFill>
-                <a:latin typeface="Arial"/>
-                <a:ea typeface="Arial"/>
-              </a:rPr>
-              <a:t>Stabilize progress</a:t>
-            </a:r>
-          </a:p>
-        </p:txBody>
-      </p:sp>
-      <p:sp>
-        <p:nvSpPr>
-          <p:cNvPr id="100010" name="S06.Pause.Number2"/>
-          <p:cNvSpPr/>
-          <p:nvPr/>
-        </p:nvSpPr>
-        <p:spPr>
-          <a:xfrm>
-            <a:off x="393192" y="5272169"/>
-            <a:ext cx="292608" cy="292608"/>
-          </a:xfrm>
-          <a:prstGeom prst="ellipse">
-            <a:avLst/>
-          </a:prstGeom>
-          <a:solidFill>
-            <a:srgbClr val="008C95"/>
-          </a:solidFill>
-          <a:ln>
-            <a:noFill/>
-          </a:ln>
-        </p:spPr>
-        <p:txBody>
-          <a:bodyPr lIns="0" tIns="0" rIns="0" bIns="0" anchor="ctr">
-            <a:noAutofit/>
-          </a:bodyPr>
-          <a:lstStyle/>
-          <a:p>
-            <a:pPr algn="ctr"/>
-            <a:r>
-              <a:rPr lang="en-US" sz="1400" b="1">
-                <a:solidFill>
-                  <a:srgbClr val="FFFFFF"/>
-                </a:solidFill>
-                <a:latin typeface="Arial"/>
-                <a:ea typeface="Arial"/>
-              </a:rPr>
-              <a:t>2</a:t>
-            </a:r>
-          </a:p>
-        </p:txBody>
-      </p:sp>
-      <p:sp>
-        <p:nvSpPr>
-          <p:cNvPr id="100011" name="S06.Pause.Text2"/>
-          <p:cNvSpPr txBox="1"/>
-          <p:nvPr/>
-        </p:nvSpPr>
-        <p:spPr>
-          <a:xfrm>
-            <a:off x="832104" y="5263025"/>
-            <a:ext cx="3044952" cy="438912"/>
-          </a:xfrm>
-          <a:prstGeom prst="rect">
-            <a:avLst/>
-          </a:prstGeom>
-          <a:noFill/>
-          <a:ln>
-            <a:noFill/>
-          </a:ln>
-        </p:spPr>
-        <p:txBody>
-          <a:bodyPr lIns="0" tIns="0" rIns="0" bIns="0">
-            <a:noAutofit/>
-          </a:bodyPr>
-          <a:lstStyle/>
-          <a:p>
-            <a:r>
-              <a:rPr lang="en-US" sz="1800">
-                <a:solidFill>
-                  <a:srgbClr val="20354A"/>
-                </a:solidFill>
-                <a:latin typeface="Arial"/>
-                <a:ea typeface="Arial"/>
-              </a:rPr>
-              <a:t>Set a common target</a:t>
-            </a:r>
-          </a:p>
-        </p:txBody>
-      </p:sp>
-      <p:sp>
-        <p:nvSpPr>
-          <p:cNvPr id="100012" name="S06.Pause.Number3"/>
-          <p:cNvSpPr/>
-          <p:nvPr/>
-        </p:nvSpPr>
-        <p:spPr>
-          <a:xfrm>
-            <a:off x="393192" y="5784233"/>
-            <a:ext cx="292608" cy="292608"/>
-          </a:xfrm>
-          <a:prstGeom prst="ellipse">
-            <a:avLst/>
-          </a:prstGeom>
-          <a:solidFill>
-            <a:srgbClr val="008C95"/>
-          </a:solidFill>
-          <a:ln>
-            <a:noFill/>
-          </a:ln>
-        </p:spPr>
-        <p:txBody>
-          <a:bodyPr lIns="0" tIns="0" rIns="0" bIns="0" anchor="ctr">
-            <a:noAutofit/>
-          </a:bodyPr>
-          <a:lstStyle/>
-          <a:p>
-            <a:pPr algn="ctr"/>
-            <a:r>
-              <a:rPr lang="en-US" sz="1400" b="1">
-                <a:solidFill>
-                  <a:srgbClr val="FFFFFF"/>
-                </a:solidFill>
-                <a:latin typeface="Arial"/>
-                <a:ea typeface="Arial"/>
-              </a:rPr>
-              <a:t>3</a:t>
-            </a:r>
-          </a:p>
-        </p:txBody>
-      </p:sp>
-      <p:sp>
-        <p:nvSpPr>
-          <p:cNvPr id="100013" name="S06.Pause.Text3"/>
-          <p:cNvSpPr txBox="1"/>
-          <p:nvPr/>
-        </p:nvSpPr>
-        <p:spPr>
-          <a:xfrm>
-            <a:off x="832104" y="5775089"/>
-            <a:ext cx="3044952" cy="438912"/>
-          </a:xfrm>
-          <a:prstGeom prst="rect">
-            <a:avLst/>
-          </a:prstGeom>
-          <a:noFill/>
-          <a:ln>
-            <a:noFill/>
-          </a:ln>
-        </p:spPr>
-        <p:txBody>
-          <a:bodyPr lIns="0" tIns="0" rIns="0" bIns="0">
-            <a:noAutofit/>
-          </a:bodyPr>
-          <a:lstStyle/>
-          <a:p>
-            <a:r>
-              <a:rPr lang="en-US" sz="1800">
-                <a:solidFill>
-                  <a:srgbClr val="20354A"/>
+                  <a:srgbClr val="1F1F1F"/>
                 </a:solidFill>
                 <a:latin typeface="Arial"/>
                 <a:ea typeface="Arial"/>
@@ -1312,16 +1314,15 @@
           <p:nvPr/>
         </p:nvPicPr>
         <p:blipFill>
-          <a:blip xmlns:r="http://schemas.openxmlformats.org/officeDocument/2006/relationships" r:embed="Rc6f3db6c3e55461b"/>
-          <a:srcRect l="35526" t="12752" r="1076" b="13846"/>
+          <a:blip xmlns:r="http://schemas.openxmlformats.org/officeDocument/2006/relationships" r:embed="R2ab8bed9cb7e4c8b"/>
           <a:stretch>
             <a:fillRect/>
           </a:stretch>
         </p:blipFill>
         <p:spPr>
           <a:xfrm>
-            <a:off x="4123944" y="1186107"/>
-            <a:ext cx="7754112" cy="5052713"/>
+            <a:off x="4114800" y="1512173"/>
+            <a:ext cx="7754112" cy="4364007"/>
           </a:xfrm>
           <a:prstGeom prst="rect">
             <a:avLst/>
@@ -1357,7 +1358,7 @@
             <a:r>
               <a:rPr lang="en-US" sz="1000">
                 <a:solidFill>
-                  <a:srgbClr val="607184"/>
+                  <a:srgbClr val="898989"/>
                 </a:solidFill>
                 <a:latin typeface="Arial"/>
                 <a:ea typeface="Arial"/>
@@ -1397,14 +1398,14 @@
               <a:buChar xmlns:a="http://schemas.openxmlformats.org/drawingml/2006/main" char="•"/>
               <a:defRPr>
                 <a:solidFill>
-                  <a:srgbClr val="20354A"/>
+                  <a:srgbClr val="1F1F1F"/>
                 </a:solidFill>
               </a:defRPr>
             </a:pPr>
             <a:r>
               <a:rPr lang="en-US">
                 <a:solidFill>
-                  <a:srgbClr val="20354A"/>
+                  <a:srgbClr val="1F1F1F"/>
                 </a:solidFill>
               </a:rPr>
               <a:t>Reduce once</a:t>
@@ -1412,7 +1413,7 @@
             <a:r>
               <a:rPr lang="en-US">
                 <a:solidFill>
-                  <a:srgbClr val="20354A"/>
+                  <a:srgbClr val="1F1F1F"/>
                 </a:solidFill>
               </a:rPr>
               <a:t xml:space="preserve"> </a:t>
@@ -1420,7 +1421,7 @@
             <a:r>
               <a:rPr lang="en-US">
                 <a:solidFill>
-                  <a:srgbClr val="20354A"/>
+                  <a:srgbClr val="1F1F1F"/>
                 </a:solidFill>
               </a:rPr>
               <a:t>data exchange  per cycle</a:t>
@@ -1456,7 +1457,7 @@
             <a:r>
               <a:rPr lang="en-US" sz="1000">
                 <a:solidFill>
-                  <a:srgbClr val="607184"/>
+                  <a:srgbClr val="898989"/>
                 </a:solidFill>
                 <a:latin typeface="Arial"/>
                 <a:ea typeface="Arial"/>
@@ -1488,13 +1489,13 @@
         <a:srgbClr val="E7E6E6"/>
       </a:lt2>
       <a:accent1>
-        <a:srgbClr val="183B56"/>
+        <a:srgbClr val="C00000"/>
       </a:accent1>
       <a:accent2>
-        <a:srgbClr val="008C95"/>
+        <a:srgbClr val="70AD47"/>
       </a:accent2>
       <a:accent3>
-        <a:srgbClr val="DF973E"/>
+        <a:srgbClr val="ED7D31"/>
       </a:accent3>
       <a:accent4>
         <a:srgbClr val="FFC000"/>
